--- a/TEMA2/Act_2.3_Banco_ de_ Ejercicio_Rafael_Aaquino-villanueva-ISC-LYA1.pptx
+++ b/TEMA2/Act_2.3_Banco_ de_ Ejercicio_Rafael_Aaquino-villanueva-ISC-LYA1.pptx
@@ -208,7 +208,7 @@
           <a:p>
             <a:fld id="{CE8B5F02-D1F5-4A8C-9E16-879D2FAAE6D2}" type="datetimeFigureOut">
               <a:rPr lang="es-MX" smtClean="0"/>
-              <a:t>03/03/2026</a:t>
+              <a:t>14/03/2026</a:t>
             </a:fld>
             <a:endParaRPr lang="es-MX"/>
           </a:p>
@@ -625,7 +625,7 @@
           <a:p>
             <a:fld id="{B744A13C-A177-47DD-903A-D74B08377F6A}" type="datetimeFigureOut">
               <a:rPr lang="es-MX" smtClean="0"/>
-              <a:t>03/03/2026</a:t>
+              <a:t>14/03/2026</a:t>
             </a:fld>
             <a:endParaRPr lang="es-MX"/>
           </a:p>
@@ -825,7 +825,7 @@
           <a:p>
             <a:fld id="{B744A13C-A177-47DD-903A-D74B08377F6A}" type="datetimeFigureOut">
               <a:rPr lang="es-MX" smtClean="0"/>
-              <a:t>03/03/2026</a:t>
+              <a:t>14/03/2026</a:t>
             </a:fld>
             <a:endParaRPr lang="es-MX"/>
           </a:p>
@@ -1035,7 +1035,7 @@
           <a:p>
             <a:fld id="{B744A13C-A177-47DD-903A-D74B08377F6A}" type="datetimeFigureOut">
               <a:rPr lang="es-MX" smtClean="0"/>
-              <a:t>03/03/2026</a:t>
+              <a:t>14/03/2026</a:t>
             </a:fld>
             <a:endParaRPr lang="es-MX"/>
           </a:p>
@@ -1235,7 +1235,7 @@
           <a:p>
             <a:fld id="{B744A13C-A177-47DD-903A-D74B08377F6A}" type="datetimeFigureOut">
               <a:rPr lang="es-MX" smtClean="0"/>
-              <a:t>03/03/2026</a:t>
+              <a:t>14/03/2026</a:t>
             </a:fld>
             <a:endParaRPr lang="es-MX"/>
           </a:p>
@@ -1511,7 +1511,7 @@
           <a:p>
             <a:fld id="{B744A13C-A177-47DD-903A-D74B08377F6A}" type="datetimeFigureOut">
               <a:rPr lang="es-MX" smtClean="0"/>
-              <a:t>03/03/2026</a:t>
+              <a:t>14/03/2026</a:t>
             </a:fld>
             <a:endParaRPr lang="es-MX"/>
           </a:p>
@@ -1779,7 +1779,7 @@
           <a:p>
             <a:fld id="{B744A13C-A177-47DD-903A-D74B08377F6A}" type="datetimeFigureOut">
               <a:rPr lang="es-MX" smtClean="0"/>
-              <a:t>03/03/2026</a:t>
+              <a:t>14/03/2026</a:t>
             </a:fld>
             <a:endParaRPr lang="es-MX"/>
           </a:p>
@@ -2194,7 +2194,7 @@
           <a:p>
             <a:fld id="{B744A13C-A177-47DD-903A-D74B08377F6A}" type="datetimeFigureOut">
               <a:rPr lang="es-MX" smtClean="0"/>
-              <a:t>03/03/2026</a:t>
+              <a:t>14/03/2026</a:t>
             </a:fld>
             <a:endParaRPr lang="es-MX"/>
           </a:p>
@@ -2336,7 +2336,7 @@
           <a:p>
             <a:fld id="{B744A13C-A177-47DD-903A-D74B08377F6A}" type="datetimeFigureOut">
               <a:rPr lang="es-MX" smtClean="0"/>
-              <a:t>03/03/2026</a:t>
+              <a:t>14/03/2026</a:t>
             </a:fld>
             <a:endParaRPr lang="es-MX"/>
           </a:p>
@@ -2449,7 +2449,7 @@
           <a:p>
             <a:fld id="{B744A13C-A177-47DD-903A-D74B08377F6A}" type="datetimeFigureOut">
               <a:rPr lang="es-MX" smtClean="0"/>
-              <a:t>03/03/2026</a:t>
+              <a:t>14/03/2026</a:t>
             </a:fld>
             <a:endParaRPr lang="es-MX"/>
           </a:p>
@@ -2762,7 +2762,7 @@
           <a:p>
             <a:fld id="{B744A13C-A177-47DD-903A-D74B08377F6A}" type="datetimeFigureOut">
               <a:rPr lang="es-MX" smtClean="0"/>
-              <a:t>03/03/2026</a:t>
+              <a:t>14/03/2026</a:t>
             </a:fld>
             <a:endParaRPr lang="es-MX"/>
           </a:p>
@@ -3051,7 +3051,7 @@
           <a:p>
             <a:fld id="{B744A13C-A177-47DD-903A-D74B08377F6A}" type="datetimeFigureOut">
               <a:rPr lang="es-MX" smtClean="0"/>
-              <a:t>03/03/2026</a:t>
+              <a:t>14/03/2026</a:t>
             </a:fld>
             <a:endParaRPr lang="es-MX"/>
           </a:p>
@@ -3294,7 +3294,7 @@
           <a:p>
             <a:fld id="{B744A13C-A177-47DD-903A-D74B08377F6A}" type="datetimeFigureOut">
               <a:rPr lang="es-MX" smtClean="0"/>
-              <a:t>03/03/2026</a:t>
+              <a:t>14/03/2026</a:t>
             </a:fld>
             <a:endParaRPr lang="es-MX"/>
           </a:p>
@@ -4344,30 +4344,13 @@
               <a:buNone/>
             </a:pPr>
             <a:r>
-              <a:rPr lang="es-MX" sz="2000" b="1" kern="0">
-                <a:latin typeface="Arial" panose="020B0604020202020204" pitchFamily="34" charset="0"/>
-                <a:ea typeface="Times New Roman" panose="02020603050405020304" pitchFamily="18" charset="0"/>
-                <a:cs typeface="Arial" panose="020B0604020202020204" pitchFamily="34" charset="0"/>
-              </a:rPr>
-              <a:t>06</a:t>
-            </a:r>
-            <a:r>
-              <a:rPr lang="es-MX" sz="2000" b="1" kern="0">
-                <a:effectLst/>
-                <a:latin typeface="Arial" panose="020B0604020202020204" pitchFamily="34" charset="0"/>
-                <a:ea typeface="Times New Roman" panose="02020603050405020304" pitchFamily="18" charset="0"/>
-                <a:cs typeface="Arial" panose="020B0604020202020204" pitchFamily="34" charset="0"/>
-              </a:rPr>
-              <a:t> </a:t>
-            </a:r>
-            <a:r>
               <a:rPr lang="es-MX" sz="2000" b="1" kern="0" dirty="0">
                 <a:effectLst/>
                 <a:latin typeface="Arial" panose="020B0604020202020204" pitchFamily="34" charset="0"/>
                 <a:ea typeface="Times New Roman" panose="02020603050405020304" pitchFamily="18" charset="0"/>
                 <a:cs typeface="Arial" panose="020B0604020202020204" pitchFamily="34" charset="0"/>
               </a:rPr>
-              <a:t>DE FEBRERO DE 2026</a:t>
+              <a:t>19 DE FEBRERO DE 2026</a:t>
             </a:r>
             <a:r>
               <a:rPr lang="es-MX" sz="1800" b="1" kern="0" dirty="0">
